--- a/output/figs/schematic_figs/schematic_fig_clade_assignment_2.pptx
+++ b/output/figs/schematic_figs/schematic_fig_clade_assignment_2.pptx
@@ -197,7 +197,7 @@
           <a:p>
             <a:fld id="{5D90DDDA-0390-7747-9092-B03DF40F8BE2}" type="datetimeFigureOut">
               <a:rPr lang="en-US" smtClean="0"/>
-              <a:t>2/17/26</a:t>
+              <a:t>3/27/26</a:t>
             </a:fld>
             <a:endParaRPr lang="en-US"/>
           </a:p>
@@ -701,7 +701,7 @@
           <a:p>
             <a:fld id="{13F85839-247B-534A-BD25-CCD76748D5B6}" type="datetimeFigureOut">
               <a:rPr lang="en-US" smtClean="0"/>
-              <a:t>2/17/26</a:t>
+              <a:t>3/27/26</a:t>
             </a:fld>
             <a:endParaRPr lang="en-US"/>
           </a:p>
@@ -901,7 +901,7 @@
           <a:p>
             <a:fld id="{13F85839-247B-534A-BD25-CCD76748D5B6}" type="datetimeFigureOut">
               <a:rPr lang="en-US" smtClean="0"/>
-              <a:t>2/17/26</a:t>
+              <a:t>3/27/26</a:t>
             </a:fld>
             <a:endParaRPr lang="en-US"/>
           </a:p>
@@ -1111,7 +1111,7 @@
           <a:p>
             <a:fld id="{13F85839-247B-534A-BD25-CCD76748D5B6}" type="datetimeFigureOut">
               <a:rPr lang="en-US" smtClean="0"/>
-              <a:t>2/17/26</a:t>
+              <a:t>3/27/26</a:t>
             </a:fld>
             <a:endParaRPr lang="en-US"/>
           </a:p>
@@ -1311,7 +1311,7 @@
           <a:p>
             <a:fld id="{13F85839-247B-534A-BD25-CCD76748D5B6}" type="datetimeFigureOut">
               <a:rPr lang="en-US" smtClean="0"/>
-              <a:t>2/17/26</a:t>
+              <a:t>3/27/26</a:t>
             </a:fld>
             <a:endParaRPr lang="en-US"/>
           </a:p>
@@ -1587,7 +1587,7 @@
           <a:p>
             <a:fld id="{13F85839-247B-534A-BD25-CCD76748D5B6}" type="datetimeFigureOut">
               <a:rPr lang="en-US" smtClean="0"/>
-              <a:t>2/17/26</a:t>
+              <a:t>3/27/26</a:t>
             </a:fld>
             <a:endParaRPr lang="en-US"/>
           </a:p>
@@ -1855,7 +1855,7 @@
           <a:p>
             <a:fld id="{13F85839-247B-534A-BD25-CCD76748D5B6}" type="datetimeFigureOut">
               <a:rPr lang="en-US" smtClean="0"/>
-              <a:t>2/17/26</a:t>
+              <a:t>3/27/26</a:t>
             </a:fld>
             <a:endParaRPr lang="en-US"/>
           </a:p>
@@ -2270,7 +2270,7 @@
           <a:p>
             <a:fld id="{13F85839-247B-534A-BD25-CCD76748D5B6}" type="datetimeFigureOut">
               <a:rPr lang="en-US" smtClean="0"/>
-              <a:t>2/17/26</a:t>
+              <a:t>3/27/26</a:t>
             </a:fld>
             <a:endParaRPr lang="en-US"/>
           </a:p>
@@ -2412,7 +2412,7 @@
           <a:p>
             <a:fld id="{13F85839-247B-534A-BD25-CCD76748D5B6}" type="datetimeFigureOut">
               <a:rPr lang="en-US" smtClean="0"/>
-              <a:t>2/17/26</a:t>
+              <a:t>3/27/26</a:t>
             </a:fld>
             <a:endParaRPr lang="en-US"/>
           </a:p>
@@ -2525,7 +2525,7 @@
           <a:p>
             <a:fld id="{13F85839-247B-534A-BD25-CCD76748D5B6}" type="datetimeFigureOut">
               <a:rPr lang="en-US" smtClean="0"/>
-              <a:t>2/17/26</a:t>
+              <a:t>3/27/26</a:t>
             </a:fld>
             <a:endParaRPr lang="en-US"/>
           </a:p>
@@ -2838,7 +2838,7 @@
           <a:p>
             <a:fld id="{13F85839-247B-534A-BD25-CCD76748D5B6}" type="datetimeFigureOut">
               <a:rPr lang="en-US" smtClean="0"/>
-              <a:t>2/17/26</a:t>
+              <a:t>3/27/26</a:t>
             </a:fld>
             <a:endParaRPr lang="en-US"/>
           </a:p>
@@ -3127,7 +3127,7 @@
           <a:p>
             <a:fld id="{13F85839-247B-534A-BD25-CCD76748D5B6}" type="datetimeFigureOut">
               <a:rPr lang="en-US" smtClean="0"/>
-              <a:t>2/17/26</a:t>
+              <a:t>3/27/26</a:t>
             </a:fld>
             <a:endParaRPr lang="en-US"/>
           </a:p>
@@ -3370,7 +3370,7 @@
           <a:p>
             <a:fld id="{13F85839-247B-534A-BD25-CCD76748D5B6}" type="datetimeFigureOut">
               <a:rPr lang="en-US" smtClean="0"/>
-              <a:t>2/17/26</a:t>
+              <a:t>3/27/26</a:t>
             </a:fld>
             <a:endParaRPr lang="en-US"/>
           </a:p>
@@ -5848,7 +5848,7 @@
         </p:nvCxnSpPr>
         <p:spPr>
           <a:xfrm>
-            <a:off x="3169548" y="2361226"/>
+            <a:off x="2883716" y="2569650"/>
             <a:ext cx="786107" cy="310895"/>
           </a:xfrm>
           <a:prstGeom prst="bentConnector3">
@@ -5889,7 +5889,7 @@
         </p:nvCxnSpPr>
         <p:spPr>
           <a:xfrm>
-            <a:off x="3955655" y="2555830"/>
+            <a:off x="3669823" y="2764254"/>
             <a:ext cx="0" cy="299180"/>
           </a:xfrm>
           <a:prstGeom prst="line">
@@ -5932,7 +5932,7 @@
         </p:nvCxnSpPr>
         <p:spPr>
           <a:xfrm flipH="1">
-            <a:off x="3955655" y="2855010"/>
+            <a:off x="3669823" y="3063434"/>
             <a:ext cx="781550" cy="0"/>
           </a:xfrm>
           <a:prstGeom prst="line">
@@ -5975,7 +5975,7 @@
         </p:nvCxnSpPr>
         <p:spPr>
           <a:xfrm flipH="1">
-            <a:off x="3955655" y="2555830"/>
+            <a:off x="3669823" y="2764254"/>
             <a:ext cx="256478" cy="0"/>
           </a:xfrm>
           <a:prstGeom prst="line">
@@ -6018,7 +6018,7 @@
         </p:nvCxnSpPr>
         <p:spPr>
           <a:xfrm>
-            <a:off x="3562601" y="2143802"/>
+            <a:off x="3276769" y="2352226"/>
             <a:ext cx="0" cy="221058"/>
           </a:xfrm>
           <a:prstGeom prst="line">
@@ -6056,7 +6056,7 @@
         </p:nvCxnSpPr>
         <p:spPr>
           <a:xfrm>
-            <a:off x="3562601" y="2143802"/>
+            <a:off x="3276769" y="2352226"/>
             <a:ext cx="718587" cy="0"/>
           </a:xfrm>
           <a:prstGeom prst="line">
@@ -6099,7 +6099,7 @@
         </p:nvCxnSpPr>
         <p:spPr>
           <a:xfrm>
-            <a:off x="4212133" y="2442258"/>
+            <a:off x="3926301" y="2650682"/>
             <a:ext cx="0" cy="216921"/>
           </a:xfrm>
           <a:prstGeom prst="line">
@@ -6142,7 +6142,7 @@
         </p:nvCxnSpPr>
         <p:spPr>
           <a:xfrm flipH="1">
-            <a:off x="4212133" y="2442258"/>
+            <a:off x="3926301" y="2650682"/>
             <a:ext cx="308517" cy="0"/>
           </a:xfrm>
           <a:prstGeom prst="line">
@@ -6185,7 +6185,7 @@
         </p:nvCxnSpPr>
         <p:spPr>
           <a:xfrm flipH="1">
-            <a:off x="4210274" y="2659179"/>
+            <a:off x="3924442" y="2867603"/>
             <a:ext cx="526931" cy="0"/>
           </a:xfrm>
           <a:prstGeom prst="line">
@@ -6226,7 +6226,7 @@
         </p:nvSpPr>
         <p:spPr>
           <a:xfrm>
-            <a:off x="4811359" y="2166544"/>
+            <a:off x="4525527" y="2374968"/>
             <a:ext cx="434843" cy="237195"/>
           </a:xfrm>
           <a:prstGeom prst="ellipse">
@@ -6286,7 +6286,7 @@
         </p:nvSpPr>
         <p:spPr>
           <a:xfrm>
-            <a:off x="4737205" y="2596625"/>
+            <a:off x="4451373" y="2805049"/>
             <a:ext cx="240636" cy="192571"/>
           </a:xfrm>
           <a:prstGeom prst="ellipse">
@@ -6346,7 +6346,7 @@
         </p:nvSpPr>
         <p:spPr>
           <a:xfrm>
-            <a:off x="4649933" y="2800702"/>
+            <a:off x="4364101" y="3009126"/>
             <a:ext cx="405837" cy="197875"/>
           </a:xfrm>
           <a:prstGeom prst="ellipse">
@@ -6408,7 +6408,7 @@
         </p:nvCxnSpPr>
         <p:spPr>
           <a:xfrm>
-            <a:off x="4281188" y="2079438"/>
+            <a:off x="3995356" y="2287862"/>
             <a:ext cx="0" cy="213510"/>
           </a:xfrm>
           <a:prstGeom prst="line">
@@ -6446,7 +6446,7 @@
         </p:nvCxnSpPr>
         <p:spPr>
           <a:xfrm flipH="1">
-            <a:off x="4281188" y="2291953"/>
+            <a:off x="3995356" y="2500377"/>
             <a:ext cx="661000" cy="8812"/>
           </a:xfrm>
           <a:prstGeom prst="line">
@@ -6484,7 +6484,7 @@
         </p:nvCxnSpPr>
         <p:spPr>
           <a:xfrm flipH="1">
-            <a:off x="4281188" y="2079438"/>
+            <a:off x="3995356" y="2287862"/>
             <a:ext cx="253098" cy="0"/>
           </a:xfrm>
           <a:prstGeom prst="line">
@@ -6522,7 +6522,7 @@
         </p:nvCxnSpPr>
         <p:spPr>
           <a:xfrm flipV="1">
-            <a:off x="4548863" y="1998136"/>
+            <a:off x="4263031" y="2206560"/>
             <a:ext cx="0" cy="173351"/>
           </a:xfrm>
           <a:prstGeom prst="line">
@@ -6560,7 +6560,7 @@
         </p:nvCxnSpPr>
         <p:spPr>
           <a:xfrm flipH="1">
-            <a:off x="4552289" y="1998136"/>
+            <a:off x="4266457" y="2206560"/>
             <a:ext cx="268260" cy="0"/>
           </a:xfrm>
           <a:prstGeom prst="line">
@@ -6598,7 +6598,7 @@
         </p:nvCxnSpPr>
         <p:spPr>
           <a:xfrm flipH="1">
-            <a:off x="4552289" y="2171487"/>
+            <a:off x="4266457" y="2379911"/>
             <a:ext cx="268260" cy="0"/>
           </a:xfrm>
           <a:prstGeom prst="line">
@@ -6634,7 +6634,7 @@
         </p:nvSpPr>
         <p:spPr>
           <a:xfrm>
-            <a:off x="4712902" y="1939057"/>
+            <a:off x="4427070" y="2147481"/>
             <a:ext cx="279900" cy="304566"/>
           </a:xfrm>
           <a:prstGeom prst="ellipse">
@@ -6691,7 +6691,7 @@
         </p:nvCxnSpPr>
         <p:spPr>
           <a:xfrm flipV="1">
-            <a:off x="4537756" y="2364860"/>
+            <a:off x="4251924" y="2573284"/>
             <a:ext cx="0" cy="173351"/>
           </a:xfrm>
           <a:prstGeom prst="line">
@@ -6729,7 +6729,7 @@
         </p:nvCxnSpPr>
         <p:spPr>
           <a:xfrm flipH="1">
-            <a:off x="4541182" y="2364860"/>
+            <a:off x="4255350" y="2573284"/>
             <a:ext cx="268260" cy="0"/>
           </a:xfrm>
           <a:prstGeom prst="line">
@@ -6767,7 +6767,7 @@
         </p:nvCxnSpPr>
         <p:spPr>
           <a:xfrm flipH="1">
-            <a:off x="4541182" y="2538211"/>
+            <a:off x="4255350" y="2746635"/>
             <a:ext cx="268260" cy="0"/>
           </a:xfrm>
           <a:prstGeom prst="line">
@@ -6803,7 +6803,7 @@
         </p:nvSpPr>
         <p:spPr>
           <a:xfrm>
-            <a:off x="4723429" y="2308260"/>
+            <a:off x="4437597" y="2516684"/>
             <a:ext cx="279900" cy="304566"/>
           </a:xfrm>
           <a:prstGeom prst="ellipse">
@@ -6861,7 +6861,7 @@
         </p:nvCxnSpPr>
         <p:spPr>
           <a:xfrm>
-            <a:off x="2702899" y="2372679"/>
+            <a:off x="2417997" y="2610992"/>
             <a:ext cx="260195" cy="7503"/>
           </a:xfrm>
           <a:prstGeom prst="straightConnector1">
@@ -12332,8 +12332,8 @@
         </p:nvSpPr>
         <p:spPr>
           <a:xfrm>
-            <a:off x="0" y="357235"/>
-            <a:ext cx="12192000" cy="1581822"/>
+            <a:off x="0" y="357234"/>
+            <a:ext cx="12192000" cy="1592145"/>
           </a:xfrm>
           <a:prstGeom prst="roundRect">
             <a:avLst/>

--- a/output/figs/schematic_figs/schematic_fig_clade_assignment_2.pptx
+++ b/output/figs/schematic_figs/schematic_fig_clade_assignment_2.pptx
@@ -5,10 +5,12 @@
     <p:sldMasterId id="2147483648" r:id="rId1"/>
   </p:sldMasterIdLst>
   <p:notesMasterIdLst>
-    <p:notesMasterId r:id="rId3"/>
+    <p:notesMasterId r:id="rId5"/>
   </p:notesMasterIdLst>
   <p:sldIdLst>
     <p:sldId id="256" r:id="rId2"/>
+    <p:sldId id="257" r:id="rId3"/>
+    <p:sldId id="258" r:id="rId4"/>
   </p:sldIdLst>
   <p:sldSz cx="12192000" cy="6858000"/>
   <p:notesSz cx="6858000" cy="9144000"/>
@@ -197,7 +199,7 @@
           <a:p>
             <a:fld id="{5D90DDDA-0390-7747-9092-B03DF40F8BE2}" type="datetimeFigureOut">
               <a:rPr lang="en-US" smtClean="0"/>
-              <a:t>3/27/26</a:t>
+              <a:t>3/31/26</a:t>
             </a:fld>
             <a:endParaRPr lang="en-US"/>
           </a:p>
@@ -701,7 +703,7 @@
           <a:p>
             <a:fld id="{13F85839-247B-534A-BD25-CCD76748D5B6}" type="datetimeFigureOut">
               <a:rPr lang="en-US" smtClean="0"/>
-              <a:t>3/27/26</a:t>
+              <a:t>3/31/26</a:t>
             </a:fld>
             <a:endParaRPr lang="en-US"/>
           </a:p>
@@ -901,7 +903,7 @@
           <a:p>
             <a:fld id="{13F85839-247B-534A-BD25-CCD76748D5B6}" type="datetimeFigureOut">
               <a:rPr lang="en-US" smtClean="0"/>
-              <a:t>3/27/26</a:t>
+              <a:t>3/31/26</a:t>
             </a:fld>
             <a:endParaRPr lang="en-US"/>
           </a:p>
@@ -1111,7 +1113,7 @@
           <a:p>
             <a:fld id="{13F85839-247B-534A-BD25-CCD76748D5B6}" type="datetimeFigureOut">
               <a:rPr lang="en-US" smtClean="0"/>
-              <a:t>3/27/26</a:t>
+              <a:t>3/31/26</a:t>
             </a:fld>
             <a:endParaRPr lang="en-US"/>
           </a:p>
@@ -1311,7 +1313,7 @@
           <a:p>
             <a:fld id="{13F85839-247B-534A-BD25-CCD76748D5B6}" type="datetimeFigureOut">
               <a:rPr lang="en-US" smtClean="0"/>
-              <a:t>3/27/26</a:t>
+              <a:t>3/31/26</a:t>
             </a:fld>
             <a:endParaRPr lang="en-US"/>
           </a:p>
@@ -1587,7 +1589,7 @@
           <a:p>
             <a:fld id="{13F85839-247B-534A-BD25-CCD76748D5B6}" type="datetimeFigureOut">
               <a:rPr lang="en-US" smtClean="0"/>
-              <a:t>3/27/26</a:t>
+              <a:t>3/31/26</a:t>
             </a:fld>
             <a:endParaRPr lang="en-US"/>
           </a:p>
@@ -1855,7 +1857,7 @@
           <a:p>
             <a:fld id="{13F85839-247B-534A-BD25-CCD76748D5B6}" type="datetimeFigureOut">
               <a:rPr lang="en-US" smtClean="0"/>
-              <a:t>3/27/26</a:t>
+              <a:t>3/31/26</a:t>
             </a:fld>
             <a:endParaRPr lang="en-US"/>
           </a:p>
@@ -2270,7 +2272,7 @@
           <a:p>
             <a:fld id="{13F85839-247B-534A-BD25-CCD76748D5B6}" type="datetimeFigureOut">
               <a:rPr lang="en-US" smtClean="0"/>
-              <a:t>3/27/26</a:t>
+              <a:t>3/31/26</a:t>
             </a:fld>
             <a:endParaRPr lang="en-US"/>
           </a:p>
@@ -2412,7 +2414,7 @@
           <a:p>
             <a:fld id="{13F85839-247B-534A-BD25-CCD76748D5B6}" type="datetimeFigureOut">
               <a:rPr lang="en-US" smtClean="0"/>
-              <a:t>3/27/26</a:t>
+              <a:t>3/31/26</a:t>
             </a:fld>
             <a:endParaRPr lang="en-US"/>
           </a:p>
@@ -2525,7 +2527,7 @@
           <a:p>
             <a:fld id="{13F85839-247B-534A-BD25-CCD76748D5B6}" type="datetimeFigureOut">
               <a:rPr lang="en-US" smtClean="0"/>
-              <a:t>3/27/26</a:t>
+              <a:t>3/31/26</a:t>
             </a:fld>
             <a:endParaRPr lang="en-US"/>
           </a:p>
@@ -2838,7 +2840,7 @@
           <a:p>
             <a:fld id="{13F85839-247B-534A-BD25-CCD76748D5B6}" type="datetimeFigureOut">
               <a:rPr lang="en-US" smtClean="0"/>
-              <a:t>3/27/26</a:t>
+              <a:t>3/31/26</a:t>
             </a:fld>
             <a:endParaRPr lang="en-US"/>
           </a:p>
@@ -3127,7 +3129,7 @@
           <a:p>
             <a:fld id="{13F85839-247B-534A-BD25-CCD76748D5B6}" type="datetimeFigureOut">
               <a:rPr lang="en-US" smtClean="0"/>
-              <a:t>3/27/26</a:t>
+              <a:t>3/31/26</a:t>
             </a:fld>
             <a:endParaRPr lang="en-US"/>
           </a:p>
@@ -3370,7 +3372,7 @@
           <a:p>
             <a:fld id="{13F85839-247B-534A-BD25-CCD76748D5B6}" type="datetimeFigureOut">
               <a:rPr lang="en-US" smtClean="0"/>
-              <a:t>3/27/26</a:t>
+              <a:t>3/31/26</a:t>
             </a:fld>
             <a:endParaRPr lang="en-US"/>
           </a:p>
@@ -12463,6 +12465,188 @@
     <p:extLst>
       <p:ext uri="{BB962C8B-B14F-4D97-AF65-F5344CB8AC3E}">
         <p14:creationId xmlns:p14="http://schemas.microsoft.com/office/powerpoint/2010/main" val="1187322009"/>
+      </p:ext>
+    </p:extLst>
+  </p:cSld>
+  <p:clrMapOvr>
+    <a:masterClrMapping/>
+  </p:clrMapOvr>
+</p:sld>
+</file>
+
+<file path=ppt/slides/slide2.xml><?xml version="1.0" encoding="utf-8"?>
+<p:sld xmlns:a="http://schemas.openxmlformats.org/drawingml/2006/main" xmlns:r="http://schemas.openxmlformats.org/officeDocument/2006/relationships" xmlns:p="http://schemas.openxmlformats.org/presentationml/2006/main">
+  <p:cSld>
+    <p:spTree>
+      <p:nvGrpSpPr>
+        <p:cNvPr id="1" name=""/>
+        <p:cNvGrpSpPr/>
+        <p:nvPr/>
+      </p:nvGrpSpPr>
+      <p:grpSpPr>
+        <a:xfrm>
+          <a:off x="0" y="0"/>
+          <a:ext cx="0" cy="0"/>
+          <a:chOff x="0" y="0"/>
+          <a:chExt cx="0" cy="0"/>
+        </a:xfrm>
+      </p:grpSpPr>
+      <p:pic>
+        <p:nvPicPr>
+          <p:cNvPr id="3" name="Picture 2" descr="A graph of different types of data&#10;&#10;AI-generated content may be incorrect.">
+            <a:extLst>
+              <a:ext uri="{FF2B5EF4-FFF2-40B4-BE49-F238E27FC236}">
+                <a16:creationId xmlns:a16="http://schemas.microsoft.com/office/drawing/2014/main" id="{A51134FD-509C-FE82-168C-D54572A6A62B}"/>
+              </a:ext>
+            </a:extLst>
+          </p:cNvPr>
+          <p:cNvPicPr>
+            <a:picLocks noChangeAspect="1"/>
+          </p:cNvPicPr>
+          <p:nvPr/>
+        </p:nvPicPr>
+        <p:blipFill>
+          <a:blip r:embed="rId2"/>
+          <a:stretch>
+            <a:fillRect/>
+          </a:stretch>
+        </p:blipFill>
+        <p:spPr>
+          <a:xfrm>
+            <a:off x="384747" y="0"/>
+            <a:ext cx="5486400" cy="6858000"/>
+          </a:xfrm>
+          <a:prstGeom prst="rect">
+            <a:avLst/>
+          </a:prstGeom>
+        </p:spPr>
+      </p:pic>
+      <p:pic>
+        <p:nvPicPr>
+          <p:cNvPr id="4" name="Picture 3" descr="A graph of different colored lines&#10;&#10;AI-generated content may be incorrect.">
+            <a:extLst>
+              <a:ext uri="{FF2B5EF4-FFF2-40B4-BE49-F238E27FC236}">
+                <a16:creationId xmlns:a16="http://schemas.microsoft.com/office/drawing/2014/main" id="{679DB016-D32B-6DA6-90CB-1068D92BB30E}"/>
+              </a:ext>
+            </a:extLst>
+          </p:cNvPr>
+          <p:cNvPicPr>
+            <a:picLocks noChangeAspect="1"/>
+          </p:cNvPicPr>
+          <p:nvPr/>
+        </p:nvPicPr>
+        <p:blipFill>
+          <a:blip r:embed="rId3"/>
+          <a:srcRect l="40951" t="5690" r="46320" b="86210"/>
+          <a:stretch>
+            <a:fillRect/>
+          </a:stretch>
+        </p:blipFill>
+        <p:spPr>
+          <a:xfrm>
+            <a:off x="5194592" y="155072"/>
+            <a:ext cx="580056" cy="184563"/>
+          </a:xfrm>
+          <a:prstGeom prst="rect">
+            <a:avLst/>
+          </a:prstGeom>
+        </p:spPr>
+      </p:pic>
+    </p:spTree>
+    <p:extLst>
+      <p:ext uri="{BB962C8B-B14F-4D97-AF65-F5344CB8AC3E}">
+        <p14:creationId xmlns:p14="http://schemas.microsoft.com/office/powerpoint/2010/main" val="3460612413"/>
+      </p:ext>
+    </p:extLst>
+  </p:cSld>
+  <p:clrMapOvr>
+    <a:masterClrMapping/>
+  </p:clrMapOvr>
+</p:sld>
+</file>
+
+<file path=ppt/slides/slide3.xml><?xml version="1.0" encoding="utf-8"?>
+<p:sld xmlns:a="http://schemas.openxmlformats.org/drawingml/2006/main" xmlns:r="http://schemas.openxmlformats.org/officeDocument/2006/relationships" xmlns:p="http://schemas.openxmlformats.org/presentationml/2006/main">
+  <p:cSld>
+    <p:spTree>
+      <p:nvGrpSpPr>
+        <p:cNvPr id="1" name=""/>
+        <p:cNvGrpSpPr/>
+        <p:nvPr/>
+      </p:nvGrpSpPr>
+      <p:grpSpPr>
+        <a:xfrm>
+          <a:off x="0" y="0"/>
+          <a:ext cx="0" cy="0"/>
+          <a:chOff x="0" y="0"/>
+          <a:chExt cx="0" cy="0"/>
+        </a:xfrm>
+      </p:grpSpPr>
+      <p:pic>
+        <p:nvPicPr>
+          <p:cNvPr id="3" name="Picture 2" descr="A collage of graphs&#10;&#10;AI-generated content may be incorrect.">
+            <a:extLst>
+              <a:ext uri="{FF2B5EF4-FFF2-40B4-BE49-F238E27FC236}">
+                <a16:creationId xmlns:a16="http://schemas.microsoft.com/office/drawing/2014/main" id="{1A97A43A-2AE9-7BA4-3F33-16CC931837E0}"/>
+              </a:ext>
+            </a:extLst>
+          </p:cNvPr>
+          <p:cNvPicPr>
+            <a:picLocks noChangeAspect="1"/>
+          </p:cNvPicPr>
+          <p:nvPr/>
+        </p:nvPicPr>
+        <p:blipFill>
+          <a:blip r:embed="rId2"/>
+          <a:stretch>
+            <a:fillRect/>
+          </a:stretch>
+        </p:blipFill>
+        <p:spPr>
+          <a:xfrm>
+            <a:off x="3352800" y="0"/>
+            <a:ext cx="5486400" cy="6858000"/>
+          </a:xfrm>
+          <a:prstGeom prst="rect">
+            <a:avLst/>
+          </a:prstGeom>
+        </p:spPr>
+      </p:pic>
+      <p:pic>
+        <p:nvPicPr>
+          <p:cNvPr id="5" name="Picture 4" descr="A graph of different colored lines&#10;&#10;AI-generated content may be incorrect.">
+            <a:extLst>
+              <a:ext uri="{FF2B5EF4-FFF2-40B4-BE49-F238E27FC236}">
+                <a16:creationId xmlns:a16="http://schemas.microsoft.com/office/drawing/2014/main" id="{75FC47C4-8FD0-A317-47E0-8F5814DD4261}"/>
+              </a:ext>
+            </a:extLst>
+          </p:cNvPr>
+          <p:cNvPicPr>
+            <a:picLocks noChangeAspect="1"/>
+          </p:cNvPicPr>
+          <p:nvPr/>
+        </p:nvPicPr>
+        <p:blipFill>
+          <a:blip r:embed="rId3"/>
+          <a:srcRect l="40951" t="5690" r="46320" b="86210"/>
+          <a:stretch>
+            <a:fillRect/>
+          </a:stretch>
+        </p:blipFill>
+        <p:spPr>
+          <a:xfrm>
+            <a:off x="8155506" y="294409"/>
+            <a:ext cx="605318" cy="192601"/>
+          </a:xfrm>
+          <a:prstGeom prst="rect">
+            <a:avLst/>
+          </a:prstGeom>
+        </p:spPr>
+      </p:pic>
+    </p:spTree>
+    <p:extLst>
+      <p:ext uri="{BB962C8B-B14F-4D97-AF65-F5344CB8AC3E}">
+        <p14:creationId xmlns:p14="http://schemas.microsoft.com/office/powerpoint/2010/main" val="379294663"/>
       </p:ext>
     </p:extLst>
   </p:cSld>
